--- a/public/fun/cards/public/public-30.pptx
+++ b/public/fun/cards/public/public-30.pptx
@@ -3085,7 +3085,7 @@
     <p:bg>
       <p:bgPr>
         <a:solidFill>
-          <a:srgbClr val="FBF8F2"/>
+          <a:srgbClr val="FFF5E6"/>
         </a:solidFill>
         <a:effectLst/>
       </p:bgPr>
@@ -3099,692 +3099,14 @@
       <p:grpSpPr/>
       <p:sp>
         <p:nvSpPr>
-          <p:cNvPr id="2" name="Oval 1"/>
-          <p:cNvSpPr/>
+          <p:cNvPr id="2" name="텍스트"/>
+          <p:cNvSpPr txBox="1"/>
           <p:nvPr/>
         </p:nvSpPr>
         <p:spPr>
           <a:xfrm>
-            <a:off x="2462400" y="158400"/>
-            <a:ext cx="43200" cy="43200"/>
-          </a:xfrm>
-          <a:prstGeom prst="ellipse">
-            <a:avLst/>
-          </a:prstGeom>
-          <a:solidFill>
-            <a:srgbClr val="917B3B">
-              <a:alpha val="70000"/>
-            </a:srgbClr>
-          </a:solidFill>
-          <a:ln>
-            <a:noFill/>
-          </a:ln>
-        </p:spPr>
-        <p:txBody>
-          <a:bodyPr rtlCol="0" anchor="ctr"/>
-          <a:lstStyle/>
-          <a:p>
-            <a:pPr algn="ctr"/>
-          </a:p>
-        </p:txBody>
-      </p:sp>
-      <p:sp>
-        <p:nvSpPr>
-          <p:cNvPr id="3" name="Oval 2"/>
-          <p:cNvSpPr/>
-          <p:nvPr/>
-        </p:nvSpPr>
-        <p:spPr>
-          <a:xfrm>
-            <a:off x="2462400" y="266400"/>
-            <a:ext cx="43200" cy="43200"/>
-          </a:xfrm>
-          <a:prstGeom prst="ellipse">
-            <a:avLst/>
-          </a:prstGeom>
-          <a:solidFill>
-            <a:srgbClr val="917B3B">
-              <a:alpha val="57999"/>
-            </a:srgbClr>
-          </a:solidFill>
-          <a:ln>
-            <a:noFill/>
-          </a:ln>
-        </p:spPr>
-        <p:txBody>
-          <a:bodyPr rtlCol="0" anchor="ctr"/>
-          <a:lstStyle/>
-          <a:p>
-            <a:pPr algn="ctr"/>
-          </a:p>
-        </p:txBody>
-      </p:sp>
-      <p:sp>
-        <p:nvSpPr>
-          <p:cNvPr id="4" name="Oval 3"/>
-          <p:cNvSpPr/>
-          <p:nvPr/>
-        </p:nvSpPr>
-        <p:spPr>
-          <a:xfrm>
-            <a:off x="2462400" y="374400"/>
-            <a:ext cx="43200" cy="43200"/>
-          </a:xfrm>
-          <a:prstGeom prst="ellipse">
-            <a:avLst/>
-          </a:prstGeom>
-          <a:solidFill>
-            <a:srgbClr val="917B3B">
-              <a:alpha val="46000"/>
-            </a:srgbClr>
-          </a:solidFill>
-          <a:ln>
-            <a:noFill/>
-          </a:ln>
-        </p:spPr>
-        <p:txBody>
-          <a:bodyPr rtlCol="0" anchor="ctr"/>
-          <a:lstStyle/>
-          <a:p>
-            <a:pPr algn="ctr"/>
-          </a:p>
-        </p:txBody>
-      </p:sp>
-      <p:sp>
-        <p:nvSpPr>
-          <p:cNvPr id="5" name="Oval 4"/>
-          <p:cNvSpPr/>
-          <p:nvPr/>
-        </p:nvSpPr>
-        <p:spPr>
-          <a:xfrm>
-            <a:off x="2462400" y="482400"/>
-            <a:ext cx="43200" cy="43200"/>
-          </a:xfrm>
-          <a:prstGeom prst="ellipse">
-            <a:avLst/>
-          </a:prstGeom>
-          <a:solidFill>
-            <a:srgbClr val="917B3B">
-              <a:alpha val="34000"/>
-            </a:srgbClr>
-          </a:solidFill>
-          <a:ln>
-            <a:noFill/>
-          </a:ln>
-        </p:spPr>
-        <p:txBody>
-          <a:bodyPr rtlCol="0" anchor="ctr"/>
-          <a:lstStyle/>
-          <a:p>
-            <a:pPr algn="ctr"/>
-          </a:p>
-        </p:txBody>
-      </p:sp>
-      <p:sp>
-        <p:nvSpPr>
-          <p:cNvPr id="6" name="Oval 5"/>
-          <p:cNvSpPr/>
-          <p:nvPr/>
-        </p:nvSpPr>
-        <p:spPr>
-          <a:xfrm>
-            <a:off x="2570400" y="158400"/>
-            <a:ext cx="43200" cy="43200"/>
-          </a:xfrm>
-          <a:prstGeom prst="ellipse">
-            <a:avLst/>
-          </a:prstGeom>
-          <a:solidFill>
-            <a:srgbClr val="917B3B">
-              <a:alpha val="70000"/>
-            </a:srgbClr>
-          </a:solidFill>
-          <a:ln>
-            <a:noFill/>
-          </a:ln>
-        </p:spPr>
-        <p:txBody>
-          <a:bodyPr rtlCol="0" anchor="ctr"/>
-          <a:lstStyle/>
-          <a:p>
-            <a:pPr algn="ctr"/>
-          </a:p>
-        </p:txBody>
-      </p:sp>
-      <p:sp>
-        <p:nvSpPr>
-          <p:cNvPr id="7" name="Oval 6"/>
-          <p:cNvSpPr/>
-          <p:nvPr/>
-        </p:nvSpPr>
-        <p:spPr>
-          <a:xfrm>
-            <a:off x="2570400" y="266400"/>
-            <a:ext cx="43200" cy="43200"/>
-          </a:xfrm>
-          <a:prstGeom prst="ellipse">
-            <a:avLst/>
-          </a:prstGeom>
-          <a:solidFill>
-            <a:srgbClr val="917B3B">
-              <a:alpha val="57999"/>
-            </a:srgbClr>
-          </a:solidFill>
-          <a:ln>
-            <a:noFill/>
-          </a:ln>
-        </p:spPr>
-        <p:txBody>
-          <a:bodyPr rtlCol="0" anchor="ctr"/>
-          <a:lstStyle/>
-          <a:p>
-            <a:pPr algn="ctr"/>
-          </a:p>
-        </p:txBody>
-      </p:sp>
-      <p:sp>
-        <p:nvSpPr>
-          <p:cNvPr id="8" name="Oval 7"/>
-          <p:cNvSpPr/>
-          <p:nvPr/>
-        </p:nvSpPr>
-        <p:spPr>
-          <a:xfrm>
-            <a:off x="2570400" y="374400"/>
-            <a:ext cx="43200" cy="43200"/>
-          </a:xfrm>
-          <a:prstGeom prst="ellipse">
-            <a:avLst/>
-          </a:prstGeom>
-          <a:solidFill>
-            <a:srgbClr val="917B3B">
-              <a:alpha val="46000"/>
-            </a:srgbClr>
-          </a:solidFill>
-          <a:ln>
-            <a:noFill/>
-          </a:ln>
-        </p:spPr>
-        <p:txBody>
-          <a:bodyPr rtlCol="0" anchor="ctr"/>
-          <a:lstStyle/>
-          <a:p>
-            <a:pPr algn="ctr"/>
-          </a:p>
-        </p:txBody>
-      </p:sp>
-      <p:sp>
-        <p:nvSpPr>
-          <p:cNvPr id="9" name="Oval 8"/>
-          <p:cNvSpPr/>
-          <p:nvPr/>
-        </p:nvSpPr>
-        <p:spPr>
-          <a:xfrm>
-            <a:off x="2570400" y="482400"/>
-            <a:ext cx="43200" cy="43200"/>
-          </a:xfrm>
-          <a:prstGeom prst="ellipse">
-            <a:avLst/>
-          </a:prstGeom>
-          <a:solidFill>
-            <a:srgbClr val="917B3B">
-              <a:alpha val="34000"/>
-            </a:srgbClr>
-          </a:solidFill>
-          <a:ln>
-            <a:noFill/>
-          </a:ln>
-        </p:spPr>
-        <p:txBody>
-          <a:bodyPr rtlCol="0" anchor="ctr"/>
-          <a:lstStyle/>
-          <a:p>
-            <a:pPr algn="ctr"/>
-          </a:p>
-        </p:txBody>
-      </p:sp>
-      <p:sp>
-        <p:nvSpPr>
-          <p:cNvPr id="10" name="Oval 9"/>
-          <p:cNvSpPr/>
-          <p:nvPr/>
-        </p:nvSpPr>
-        <p:spPr>
-          <a:xfrm>
-            <a:off x="2678400" y="158400"/>
-            <a:ext cx="43200" cy="43200"/>
-          </a:xfrm>
-          <a:prstGeom prst="ellipse">
-            <a:avLst/>
-          </a:prstGeom>
-          <a:solidFill>
-            <a:srgbClr val="917B3B">
-              <a:alpha val="70000"/>
-            </a:srgbClr>
-          </a:solidFill>
-          <a:ln>
-            <a:noFill/>
-          </a:ln>
-        </p:spPr>
-        <p:txBody>
-          <a:bodyPr rtlCol="0" anchor="ctr"/>
-          <a:lstStyle/>
-          <a:p>
-            <a:pPr algn="ctr"/>
-          </a:p>
-        </p:txBody>
-      </p:sp>
-      <p:sp>
-        <p:nvSpPr>
-          <p:cNvPr id="11" name="Oval 10"/>
-          <p:cNvSpPr/>
-          <p:nvPr/>
-        </p:nvSpPr>
-        <p:spPr>
-          <a:xfrm>
-            <a:off x="2678400" y="266400"/>
-            <a:ext cx="43200" cy="43200"/>
-          </a:xfrm>
-          <a:prstGeom prst="ellipse">
-            <a:avLst/>
-          </a:prstGeom>
-          <a:solidFill>
-            <a:srgbClr val="917B3B">
-              <a:alpha val="57999"/>
-            </a:srgbClr>
-          </a:solidFill>
-          <a:ln>
-            <a:noFill/>
-          </a:ln>
-        </p:spPr>
-        <p:txBody>
-          <a:bodyPr rtlCol="0" anchor="ctr"/>
-          <a:lstStyle/>
-          <a:p>
-            <a:pPr algn="ctr"/>
-          </a:p>
-        </p:txBody>
-      </p:sp>
-      <p:sp>
-        <p:nvSpPr>
-          <p:cNvPr id="12" name="Oval 11"/>
-          <p:cNvSpPr/>
-          <p:nvPr/>
-        </p:nvSpPr>
-        <p:spPr>
-          <a:xfrm>
-            <a:off x="2678400" y="374400"/>
-            <a:ext cx="43200" cy="43200"/>
-          </a:xfrm>
-          <a:prstGeom prst="ellipse">
-            <a:avLst/>
-          </a:prstGeom>
-          <a:solidFill>
-            <a:srgbClr val="917B3B">
-              <a:alpha val="46000"/>
-            </a:srgbClr>
-          </a:solidFill>
-          <a:ln>
-            <a:noFill/>
-          </a:ln>
-        </p:spPr>
-        <p:txBody>
-          <a:bodyPr rtlCol="0" anchor="ctr"/>
-          <a:lstStyle/>
-          <a:p>
-            <a:pPr algn="ctr"/>
-          </a:p>
-        </p:txBody>
-      </p:sp>
-      <p:sp>
-        <p:nvSpPr>
-          <p:cNvPr id="13" name="Oval 12"/>
-          <p:cNvSpPr/>
-          <p:nvPr/>
-        </p:nvSpPr>
-        <p:spPr>
-          <a:xfrm>
-            <a:off x="2678400" y="482400"/>
-            <a:ext cx="43200" cy="43200"/>
-          </a:xfrm>
-          <a:prstGeom prst="ellipse">
-            <a:avLst/>
-          </a:prstGeom>
-          <a:solidFill>
-            <a:srgbClr val="917B3B">
-              <a:alpha val="34000"/>
-            </a:srgbClr>
-          </a:solidFill>
-          <a:ln>
-            <a:noFill/>
-          </a:ln>
-        </p:spPr>
-        <p:txBody>
-          <a:bodyPr rtlCol="0" anchor="ctr"/>
-          <a:lstStyle/>
-          <a:p>
-            <a:pPr algn="ctr"/>
-          </a:p>
-        </p:txBody>
-      </p:sp>
-      <p:sp>
-        <p:nvSpPr>
-          <p:cNvPr id="14" name="Oval 13"/>
-          <p:cNvSpPr/>
-          <p:nvPr/>
-        </p:nvSpPr>
-        <p:spPr>
-          <a:xfrm>
-            <a:off x="2786400" y="158400"/>
-            <a:ext cx="43200" cy="43200"/>
-          </a:xfrm>
-          <a:prstGeom prst="ellipse">
-            <a:avLst/>
-          </a:prstGeom>
-          <a:solidFill>
-            <a:srgbClr val="917B3B">
-              <a:alpha val="70000"/>
-            </a:srgbClr>
-          </a:solidFill>
-          <a:ln>
-            <a:noFill/>
-          </a:ln>
-        </p:spPr>
-        <p:txBody>
-          <a:bodyPr rtlCol="0" anchor="ctr"/>
-          <a:lstStyle/>
-          <a:p>
-            <a:pPr algn="ctr"/>
-          </a:p>
-        </p:txBody>
-      </p:sp>
-      <p:sp>
-        <p:nvSpPr>
-          <p:cNvPr id="15" name="Oval 14"/>
-          <p:cNvSpPr/>
-          <p:nvPr/>
-        </p:nvSpPr>
-        <p:spPr>
-          <a:xfrm>
-            <a:off x="2786400" y="266400"/>
-            <a:ext cx="43200" cy="43200"/>
-          </a:xfrm>
-          <a:prstGeom prst="ellipse">
-            <a:avLst/>
-          </a:prstGeom>
-          <a:solidFill>
-            <a:srgbClr val="917B3B">
-              <a:alpha val="57999"/>
-            </a:srgbClr>
-          </a:solidFill>
-          <a:ln>
-            <a:noFill/>
-          </a:ln>
-        </p:spPr>
-        <p:txBody>
-          <a:bodyPr rtlCol="0" anchor="ctr"/>
-          <a:lstStyle/>
-          <a:p>
-            <a:pPr algn="ctr"/>
-          </a:p>
-        </p:txBody>
-      </p:sp>
-      <p:sp>
-        <p:nvSpPr>
-          <p:cNvPr id="16" name="Oval 15"/>
-          <p:cNvSpPr/>
-          <p:nvPr/>
-        </p:nvSpPr>
-        <p:spPr>
-          <a:xfrm>
-            <a:off x="2786400" y="374400"/>
-            <a:ext cx="43200" cy="43200"/>
-          </a:xfrm>
-          <a:prstGeom prst="ellipse">
-            <a:avLst/>
-          </a:prstGeom>
-          <a:solidFill>
-            <a:srgbClr val="917B3B">
-              <a:alpha val="46000"/>
-            </a:srgbClr>
-          </a:solidFill>
-          <a:ln>
-            <a:noFill/>
-          </a:ln>
-        </p:spPr>
-        <p:txBody>
-          <a:bodyPr rtlCol="0" anchor="ctr"/>
-          <a:lstStyle/>
-          <a:p>
-            <a:pPr algn="ctr"/>
-          </a:p>
-        </p:txBody>
-      </p:sp>
-      <p:sp>
-        <p:nvSpPr>
-          <p:cNvPr id="17" name="Oval 16"/>
-          <p:cNvSpPr/>
-          <p:nvPr/>
-        </p:nvSpPr>
-        <p:spPr>
-          <a:xfrm>
-            <a:off x="2786400" y="482400"/>
-            <a:ext cx="43200" cy="43200"/>
-          </a:xfrm>
-          <a:prstGeom prst="ellipse">
-            <a:avLst/>
-          </a:prstGeom>
-          <a:solidFill>
-            <a:srgbClr val="917B3B">
-              <a:alpha val="34000"/>
-            </a:srgbClr>
-          </a:solidFill>
-          <a:ln>
-            <a:noFill/>
-          </a:ln>
-        </p:spPr>
-        <p:txBody>
-          <a:bodyPr rtlCol="0" anchor="ctr"/>
-          <a:lstStyle/>
-          <a:p>
-            <a:pPr algn="ctr"/>
-          </a:p>
-        </p:txBody>
-      </p:sp>
-      <p:sp>
-        <p:nvSpPr>
-          <p:cNvPr id="18" name="Oval 17"/>
-          <p:cNvSpPr/>
-          <p:nvPr/>
-        </p:nvSpPr>
-        <p:spPr>
-          <a:xfrm>
-            <a:off x="2894400" y="158400"/>
-            <a:ext cx="43200" cy="43200"/>
-          </a:xfrm>
-          <a:prstGeom prst="ellipse">
-            <a:avLst/>
-          </a:prstGeom>
-          <a:solidFill>
-            <a:srgbClr val="917B3B">
-              <a:alpha val="70000"/>
-            </a:srgbClr>
-          </a:solidFill>
-          <a:ln>
-            <a:noFill/>
-          </a:ln>
-        </p:spPr>
-        <p:txBody>
-          <a:bodyPr rtlCol="0" anchor="ctr"/>
-          <a:lstStyle/>
-          <a:p>
-            <a:pPr algn="ctr"/>
-          </a:p>
-        </p:txBody>
-      </p:sp>
-      <p:sp>
-        <p:nvSpPr>
-          <p:cNvPr id="19" name="Oval 18"/>
-          <p:cNvSpPr/>
-          <p:nvPr/>
-        </p:nvSpPr>
-        <p:spPr>
-          <a:xfrm>
-            <a:off x="2894400" y="266400"/>
-            <a:ext cx="43200" cy="43200"/>
-          </a:xfrm>
-          <a:prstGeom prst="ellipse">
-            <a:avLst/>
-          </a:prstGeom>
-          <a:solidFill>
-            <a:srgbClr val="917B3B">
-              <a:alpha val="57999"/>
-            </a:srgbClr>
-          </a:solidFill>
-          <a:ln>
-            <a:noFill/>
-          </a:ln>
-        </p:spPr>
-        <p:txBody>
-          <a:bodyPr rtlCol="0" anchor="ctr"/>
-          <a:lstStyle/>
-          <a:p>
-            <a:pPr algn="ctr"/>
-          </a:p>
-        </p:txBody>
-      </p:sp>
-      <p:sp>
-        <p:nvSpPr>
-          <p:cNvPr id="20" name="Oval 19"/>
-          <p:cNvSpPr/>
-          <p:nvPr/>
-        </p:nvSpPr>
-        <p:spPr>
-          <a:xfrm>
-            <a:off x="2894400" y="374400"/>
-            <a:ext cx="43200" cy="43200"/>
-          </a:xfrm>
-          <a:prstGeom prst="ellipse">
-            <a:avLst/>
-          </a:prstGeom>
-          <a:solidFill>
-            <a:srgbClr val="917B3B">
-              <a:alpha val="46000"/>
-            </a:srgbClr>
-          </a:solidFill>
-          <a:ln>
-            <a:noFill/>
-          </a:ln>
-        </p:spPr>
-        <p:txBody>
-          <a:bodyPr rtlCol="0" anchor="ctr"/>
-          <a:lstStyle/>
-          <a:p>
-            <a:pPr algn="ctr"/>
-          </a:p>
-        </p:txBody>
-      </p:sp>
-      <p:sp>
-        <p:nvSpPr>
-          <p:cNvPr id="21" name="Oval 20"/>
-          <p:cNvSpPr/>
-          <p:nvPr/>
-        </p:nvSpPr>
-        <p:spPr>
-          <a:xfrm>
-            <a:off x="2894400" y="482400"/>
-            <a:ext cx="43200" cy="43200"/>
-          </a:xfrm>
-          <a:prstGeom prst="ellipse">
-            <a:avLst/>
-          </a:prstGeom>
-          <a:solidFill>
-            <a:srgbClr val="917B3B">
-              <a:alpha val="34000"/>
-            </a:srgbClr>
-          </a:solidFill>
-          <a:ln>
-            <a:noFill/>
-          </a:ln>
-        </p:spPr>
-        <p:txBody>
-          <a:bodyPr rtlCol="0" anchor="ctr"/>
-          <a:lstStyle/>
-          <a:p>
-            <a:pPr algn="ctr"/>
-          </a:p>
-        </p:txBody>
-      </p:sp>
-      <p:sp>
-        <p:nvSpPr>
-          <p:cNvPr id="22" name="Rectangle 21"/>
-          <p:cNvSpPr/>
-          <p:nvPr/>
-        </p:nvSpPr>
-        <p:spPr>
-          <a:xfrm>
-            <a:off x="0" y="1663200"/>
-            <a:ext cx="3240000" cy="136800"/>
-          </a:xfrm>
-          <a:prstGeom prst="rect">
-            <a:avLst/>
-          </a:prstGeom>
-          <a:solidFill>
-            <a:srgbClr val="917B3B"/>
-          </a:solidFill>
-          <a:ln>
-            <a:noFill/>
-          </a:ln>
-        </p:spPr>
-        <p:txBody>
-          <a:bodyPr rtlCol="0" anchor="ctr"/>
-          <a:lstStyle/>
-          <a:p>
-            <a:pPr algn="ctr"/>
-          </a:p>
-        </p:txBody>
-      </p:sp>
-      <p:sp>
-        <p:nvSpPr>
-          <p:cNvPr id="23" name="Rectangle 22"/>
-          <p:cNvSpPr/>
-          <p:nvPr/>
-        </p:nvSpPr>
-        <p:spPr>
-          <a:xfrm>
-            <a:off x="0" y="1663200"/>
-            <a:ext cx="936000" cy="136800"/>
-          </a:xfrm>
-          <a:prstGeom prst="rect">
-            <a:avLst/>
-          </a:prstGeom>
-          <a:solidFill>
-            <a:srgbClr val="E0DAC8"/>
-          </a:solidFill>
-          <a:ln>
-            <a:noFill/>
-          </a:ln>
-        </p:spPr>
-        <p:txBody>
-          <a:bodyPr rtlCol="0" anchor="ctr"/>
-          <a:lstStyle/>
-          <a:p>
-            <a:pPr algn="ctr"/>
-          </a:p>
-        </p:txBody>
-      </p:sp>
-      <p:sp>
-        <p:nvSpPr>
-          <p:cNvPr id="24" name="텍스트"/>
-          <p:cNvSpPr txBox="1"/>
-          <p:nvPr/>
-        </p:nvSpPr>
-        <p:spPr>
-          <a:xfrm>
-            <a:off x="252000" y="208800"/>
-            <a:ext cx="1800000" cy="100800"/>
+            <a:off x="252000" y="223200"/>
+            <a:ext cx="2016000" cy="133351"/>
           </a:xfrm>
           <a:prstGeom prst="rect">
             <a:avLst/>
@@ -3799,13 +3121,13 @@
           <a:p>
             <a:pPr algn="l">
               <a:lnSpc>
-                <a:spcPts val="1087"/>
+                <a:spcPts val="1015"/>
               </a:lnSpc>
             </a:pPr>
             <a:r>
-              <a:rPr sz="750" b="1" spc="150">
+              <a:rPr sz="700" b="1" spc="200">
                 <a:solidFill>
-                  <a:srgbClr val="72678E"/>
+                  <a:srgbClr val="6C4915"/>
                 </a:solidFill>
                 <a:latin typeface="맑은 고딕"/>
                 <a:ea typeface="맑은 고딕"/>
@@ -3817,14 +3139,14 @@
       </p:sp>
       <p:sp>
         <p:nvSpPr>
-          <p:cNvPr id="25" name="텍스트"/>
+          <p:cNvPr id="3" name="텍스트"/>
           <p:cNvSpPr txBox="1"/>
           <p:nvPr/>
         </p:nvSpPr>
         <p:spPr>
           <a:xfrm>
-            <a:off x="252000" y="540000"/>
-            <a:ext cx="2016000" cy="313692"/>
+            <a:off x="252000" y="468000"/>
+            <a:ext cx="2520000" cy="360000"/>
           </a:xfrm>
           <a:prstGeom prst="rect">
             <a:avLst/>
@@ -3839,13 +3161,13 @@
           <a:p>
             <a:pPr algn="l">
               <a:lnSpc>
-                <a:spcPts val="2755"/>
+                <a:spcPts val="3190"/>
               </a:lnSpc>
             </a:pPr>
             <a:r>
-              <a:rPr sz="1900" b="1" spc="50">
+              <a:rPr sz="2200" b="1">
                 <a:solidFill>
-                  <a:srgbClr val="47347F"/>
+                  <a:srgbClr val="12151C"/>
                 </a:solidFill>
                 <a:latin typeface="맑은 고딕"/>
                 <a:ea typeface="맑은 고딕"/>
@@ -3857,14 +3179,14 @@
       </p:sp>
       <p:sp>
         <p:nvSpPr>
-          <p:cNvPr id="26" name="텍스트"/>
+          <p:cNvPr id="4" name="텍스트"/>
           <p:cNvSpPr txBox="1"/>
           <p:nvPr/>
         </p:nvSpPr>
         <p:spPr>
           <a:xfrm>
-            <a:off x="252000" y="828000"/>
-            <a:ext cx="2016000" cy="122400"/>
+            <a:off x="252000" y="871200"/>
+            <a:ext cx="2520000" cy="171451"/>
           </a:xfrm>
           <a:prstGeom prst="rect">
             <a:avLst/>
@@ -3879,13 +3201,13 @@
           <a:p>
             <a:pPr algn="l">
               <a:lnSpc>
-                <a:spcPts val="1232"/>
+                <a:spcPts val="1305"/>
               </a:lnSpc>
             </a:pPr>
             <a:r>
-              <a:rPr sz="850" b="1">
+              <a:rPr sz="900" b="0">
                 <a:solidFill>
-                  <a:srgbClr val="826F35"/>
+                  <a:srgbClr val="6C4915"/>
                 </a:solidFill>
                 <a:latin typeface="맑은 고딕"/>
                 <a:ea typeface="맑은 고딕"/>
@@ -3897,14 +3219,14 @@
       </p:sp>
       <p:sp>
         <p:nvSpPr>
-          <p:cNvPr id="27" name="텍스트"/>
+          <p:cNvPr id="5" name="텍스트"/>
           <p:cNvSpPr txBox="1"/>
           <p:nvPr/>
         </p:nvSpPr>
         <p:spPr>
           <a:xfrm>
-            <a:off x="252000" y="1108800"/>
-            <a:ext cx="122400" cy="168911"/>
+            <a:off x="252000" y="1216800"/>
+            <a:ext cx="2520000" cy="129541"/>
           </a:xfrm>
           <a:prstGeom prst="rect">
             <a:avLst/>
@@ -3919,32 +3241,61 @@
           <a:p>
             <a:pPr algn="l">
               <a:lnSpc>
-                <a:spcPts val="1015"/>
+                <a:spcPts val="986"/>
               </a:lnSpc>
             </a:pPr>
             <a:r>
-              <a:rPr sz="700" b="1">
+              <a:rPr sz="680" b="0">
                 <a:solidFill>
-                  <a:srgbClr val="826F35"/>
+                  <a:srgbClr val="6C4915"/>
                 </a:solidFill>
                 <a:latin typeface="맑은 고딕"/>
                 <a:ea typeface="맑은 고딕"/>
               </a:rPr>
-              <a:t>T</a:t>
-            </a:r>
-          </a:p>
-        </p:txBody>
-      </p:sp>
-      <p:sp>
-        <p:nvSpPr>
-          <p:cNvPr id="28" name="텍스트"/>
+              <a:t>주소를 입력해 주세요</a:t>
+            </a:r>
+          </a:p>
+        </p:txBody>
+      </p:sp>
+      <p:sp>
+        <p:nvSpPr>
+          <p:cNvPr id="6" name="Rectangle 5"/>
+          <p:cNvSpPr/>
+          <p:nvPr/>
+        </p:nvSpPr>
+        <p:spPr>
+          <a:xfrm>
+            <a:off x="0" y="1476000"/>
+            <a:ext cx="3240000" cy="324000"/>
+          </a:xfrm>
+          <a:prstGeom prst="rect">
+            <a:avLst/>
+          </a:prstGeom>
+          <a:solidFill>
+            <a:srgbClr val="FF9F0A"/>
+          </a:solidFill>
+          <a:ln>
+            <a:noFill/>
+          </a:ln>
+        </p:spPr>
+        <p:txBody>
+          <a:bodyPr rtlCol="0" anchor="ctr"/>
+          <a:lstStyle/>
+          <a:p>
+            <a:pPr algn="ctr"/>
+          </a:p>
+        </p:txBody>
+      </p:sp>
+      <p:sp>
+        <p:nvSpPr>
+          <p:cNvPr id="7" name="텍스트"/>
           <p:cNvSpPr txBox="1"/>
           <p:nvPr/>
         </p:nvSpPr>
         <p:spPr>
           <a:xfrm>
-            <a:off x="396000" y="1108800"/>
-            <a:ext cx="1584000" cy="168911"/>
+            <a:off x="252000" y="1569600"/>
+            <a:ext cx="1296000" cy="133351"/>
           </a:xfrm>
           <a:prstGeom prst="rect">
             <a:avLst/>
@@ -3963,9 +3314,9 @@
               </a:lnSpc>
             </a:pPr>
             <a:r>
-              <a:rPr sz="700" b="0">
+              <a:rPr sz="700" b="1">
                 <a:solidFill>
-                  <a:srgbClr val="47347F"/>
+                  <a:srgbClr val="12151C"/>
                 </a:solidFill>
                 <a:latin typeface="맑은 고딕"/>
                 <a:ea typeface="맑은 고딕"/>
@@ -3977,14 +3328,14 @@
       </p:sp>
       <p:sp>
         <p:nvSpPr>
-          <p:cNvPr id="29" name="텍스트"/>
+          <p:cNvPr id="8" name="텍스트"/>
           <p:cNvSpPr txBox="1"/>
           <p:nvPr/>
         </p:nvSpPr>
         <p:spPr>
           <a:xfrm>
-            <a:off x="252000" y="1277711"/>
-            <a:ext cx="122400" cy="168911"/>
+            <a:off x="1656000" y="1569600"/>
+            <a:ext cx="1368000" cy="133351"/>
           </a:xfrm>
           <a:prstGeom prst="rect">
             <a:avLst/>
@@ -4005,233 +3356,13 @@
             <a:r>
               <a:rPr sz="700" b="1">
                 <a:solidFill>
-                  <a:srgbClr val="826F35"/>
-                </a:solidFill>
-                <a:latin typeface="맑은 고딕"/>
-                <a:ea typeface="맑은 고딕"/>
-              </a:rPr>
-              <a:t>E</a:t>
-            </a:r>
-          </a:p>
-        </p:txBody>
-      </p:sp>
-      <p:sp>
-        <p:nvSpPr>
-          <p:cNvPr id="30" name="텍스트"/>
-          <p:cNvSpPr txBox="1"/>
-          <p:nvPr/>
-        </p:nvSpPr>
-        <p:spPr>
-          <a:xfrm>
-            <a:off x="396000" y="1277711"/>
-            <a:ext cx="1584000" cy="168911"/>
-          </a:xfrm>
-          <a:prstGeom prst="rect">
-            <a:avLst/>
-          </a:prstGeom>
-          <a:noFill/>
-        </p:spPr>
-        <p:txBody>
-          <a:bodyPr wrap="square" lIns="0" rIns="0" tIns="0" bIns="0" anchor="t">
-            <a:spAutoFit/>
-          </a:bodyPr>
-          <a:lstStyle/>
-          <a:p>
-            <a:pPr algn="l">
-              <a:lnSpc>
-                <a:spcPts val="1015"/>
-              </a:lnSpc>
-            </a:pPr>
-            <a:r>
-              <a:rPr sz="700" b="0">
-                <a:solidFill>
-                  <a:srgbClr val="47347F"/>
+                  <a:srgbClr val="12151C"/>
                 </a:solidFill>
                 <a:latin typeface="맑은 고딕"/>
                 <a:ea typeface="맑은 고딕"/>
               </a:rPr>
               <a:t>name@example.com</a:t>
             </a:r>
-          </a:p>
-        </p:txBody>
-      </p:sp>
-      <p:sp>
-        <p:nvSpPr>
-          <p:cNvPr id="31" name="텍스트"/>
-          <p:cNvSpPr txBox="1"/>
-          <p:nvPr/>
-        </p:nvSpPr>
-        <p:spPr>
-          <a:xfrm>
-            <a:off x="252000" y="1446622"/>
-            <a:ext cx="122400" cy="168911"/>
-          </a:xfrm>
-          <a:prstGeom prst="rect">
-            <a:avLst/>
-          </a:prstGeom>
-          <a:noFill/>
-        </p:spPr>
-        <p:txBody>
-          <a:bodyPr wrap="square" lIns="0" rIns="0" tIns="0" bIns="0" anchor="t">
-            <a:spAutoFit/>
-          </a:bodyPr>
-          <a:lstStyle/>
-          <a:p>
-            <a:pPr algn="l">
-              <a:lnSpc>
-                <a:spcPts val="1015"/>
-              </a:lnSpc>
-            </a:pPr>
-            <a:r>
-              <a:rPr sz="700" b="1">
-                <a:solidFill>
-                  <a:srgbClr val="826F35"/>
-                </a:solidFill>
-                <a:latin typeface="맑은 고딕"/>
-                <a:ea typeface="맑은 고딕"/>
-              </a:rPr>
-              <a:t>A</a:t>
-            </a:r>
-          </a:p>
-        </p:txBody>
-      </p:sp>
-      <p:sp>
-        <p:nvSpPr>
-          <p:cNvPr id="32" name="텍스트"/>
-          <p:cNvSpPr txBox="1"/>
-          <p:nvPr/>
-        </p:nvSpPr>
-        <p:spPr>
-          <a:xfrm>
-            <a:off x="396000" y="1446622"/>
-            <a:ext cx="1584000" cy="168911"/>
-          </a:xfrm>
-          <a:prstGeom prst="rect">
-            <a:avLst/>
-          </a:prstGeom>
-          <a:noFill/>
-        </p:spPr>
-        <p:txBody>
-          <a:bodyPr wrap="square" lIns="0" rIns="0" tIns="0" bIns="0" anchor="t">
-            <a:spAutoFit/>
-          </a:bodyPr>
-          <a:lstStyle/>
-          <a:p>
-            <a:pPr algn="l">
-              <a:lnSpc>
-                <a:spcPts val="1015"/>
-              </a:lnSpc>
-            </a:pPr>
-            <a:r>
-              <a:rPr sz="700" b="0">
-                <a:solidFill>
-                  <a:srgbClr val="47347F"/>
-                </a:solidFill>
-                <a:latin typeface="맑은 고딕"/>
-                <a:ea typeface="맑은 고딕"/>
-              </a:rPr>
-              <a:t>주소를 입력해 주세요</a:t>
-            </a:r>
-          </a:p>
-        </p:txBody>
-      </p:sp>
-      <p:sp>
-        <p:nvSpPr>
-          <p:cNvPr id="33" name="Freeform 32"/>
-          <p:cNvSpPr/>
-          <p:nvPr/>
-        </p:nvSpPr>
-        <p:spPr>
-          <a:xfrm>
-            <a:off x="2747520" y="1107360"/>
-            <a:ext cx="126720" cy="184320"/>
-          </a:xfrm>
-          <a:custGeom>
-            <a:avLst/>
-            <a:gdLst/>
-            <a:ahLst/>
-            <a:cxnLst/>
-            <a:rect l="l" t="t" r="r" b="b"/>
-            <a:pathLst>
-              <a:path w="126720" h="184320">
-                <a:moveTo>
-                  <a:pt x="0" y="0"/>
-                </a:moveTo>
-                <a:lnTo>
-                  <a:pt x="126720" y="23040"/>
-                </a:lnTo>
-                <a:lnTo>
-                  <a:pt x="126720" y="184320"/>
-                </a:lnTo>
-                <a:lnTo>
-                  <a:pt x="0" y="161280"/>
-                </a:lnTo>
-                <a:close/>
-              </a:path>
-            </a:pathLst>
-          </a:custGeom>
-          <a:solidFill>
-            <a:srgbClr val="917B3B"/>
-          </a:solidFill>
-          <a:ln>
-            <a:noFill/>
-          </a:ln>
-        </p:spPr>
-        <p:txBody>
-          <a:bodyPr rtlCol="0" anchor="ctr"/>
-          <a:lstStyle/>
-          <a:p>
-            <a:pPr algn="ctr"/>
-          </a:p>
-        </p:txBody>
-      </p:sp>
-      <p:sp>
-        <p:nvSpPr>
-          <p:cNvPr id="34" name="Freeform 33"/>
-          <p:cNvSpPr/>
-          <p:nvPr/>
-        </p:nvSpPr>
-        <p:spPr>
-          <a:xfrm>
-            <a:off x="2885760" y="1107360"/>
-            <a:ext cx="126720" cy="184320"/>
-          </a:xfrm>
-          <a:custGeom>
-            <a:avLst/>
-            <a:gdLst/>
-            <a:ahLst/>
-            <a:cxnLst/>
-            <a:rect l="l" t="t" r="r" b="b"/>
-            <a:pathLst>
-              <a:path w="126720" h="184320">
-                <a:moveTo>
-                  <a:pt x="126720" y="0"/>
-                </a:moveTo>
-                <a:lnTo>
-                  <a:pt x="0" y="23040"/>
-                </a:lnTo>
-                <a:lnTo>
-                  <a:pt x="0" y="184320"/>
-                </a:lnTo>
-                <a:lnTo>
-                  <a:pt x="126720" y="161280"/>
-                </a:lnTo>
-                <a:close/>
-              </a:path>
-            </a:pathLst>
-          </a:custGeom>
-          <a:solidFill>
-            <a:srgbClr val="E0DAC8"/>
-          </a:solidFill>
-          <a:ln>
-            <a:noFill/>
-          </a:ln>
-        </p:spPr>
-        <p:txBody>
-          <a:bodyPr rtlCol="0" anchor="ctr"/>
-          <a:lstStyle/>
-          <a:p>
-            <a:pPr algn="ctr"/>
           </a:p>
         </p:txBody>
       </p:sp>
@@ -4249,7 +3380,7 @@
     <p:bg>
       <p:bgPr>
         <a:solidFill>
-          <a:srgbClr val="FFFFFF"/>
+          <a:srgbClr val="F3F4F6"/>
         </a:solidFill>
         <a:effectLst/>
       </p:bgPr>
@@ -4270,13 +3401,13 @@
         <p:spPr>
           <a:xfrm>
             <a:off x="0" y="0"/>
-            <a:ext cx="1224000" cy="1800000"/>
+            <a:ext cx="3240000" cy="1800000"/>
           </a:xfrm>
           <a:prstGeom prst="rect">
             <a:avLst/>
           </a:prstGeom>
           <a:solidFill>
-            <a:srgbClr val="308854"/>
+            <a:srgbClr val="FF9F0A"/>
           </a:solidFill>
           <a:ln>
             <a:noFill/>
@@ -4298,8 +3429,8 @@
         </p:nvSpPr>
         <p:spPr>
           <a:xfrm>
-            <a:off x="363600" y="748800"/>
-            <a:ext cx="237600" cy="345600"/>
+            <a:off x="2412000" y="972000"/>
+            <a:ext cx="828000" cy="828000"/>
           </a:xfrm>
           <a:custGeom>
             <a:avLst/>
@@ -4308,25 +3439,91 @@
             <a:cxnLst/>
             <a:rect l="l" t="t" r="r" b="b"/>
             <a:pathLst>
-              <a:path w="237600" h="345600">
+              <a:path w="828000" h="828000">
                 <a:moveTo>
-                  <a:pt x="0" y="0"/>
+                  <a:pt x="828000" y="828000"/>
                 </a:moveTo>
                 <a:lnTo>
-                  <a:pt x="237600" y="43200"/>
+                  <a:pt x="0" y="828000"/>
                 </a:lnTo>
                 <a:lnTo>
-                  <a:pt x="237600" y="345600"/>
+                  <a:pt x="1773" y="773846"/>
                 </a:lnTo>
                 <a:lnTo>
-                  <a:pt x="0" y="302400"/>
+                  <a:pt x="7084" y="719924"/>
+                </a:lnTo>
+                <a:lnTo>
+                  <a:pt x="15910" y="666465"/>
+                </a:lnTo>
+                <a:lnTo>
+                  <a:pt x="28213" y="613698"/>
+                </a:lnTo>
+                <a:lnTo>
+                  <a:pt x="43942" y="561848"/>
+                </a:lnTo>
+                <a:lnTo>
+                  <a:pt x="63028" y="511138"/>
+                </a:lnTo>
+                <a:lnTo>
+                  <a:pt x="85389" y="461785"/>
+                </a:lnTo>
+                <a:lnTo>
+                  <a:pt x="110931" y="414000"/>
+                </a:lnTo>
+                <a:lnTo>
+                  <a:pt x="139543" y="367988"/>
+                </a:lnTo>
+                <a:lnTo>
+                  <a:pt x="171103" y="323946"/>
+                </a:lnTo>
+                <a:lnTo>
+                  <a:pt x="205477" y="282062"/>
+                </a:lnTo>
+                <a:lnTo>
+                  <a:pt x="242516" y="242516"/>
+                </a:lnTo>
+                <a:lnTo>
+                  <a:pt x="282062" y="205477"/>
+                </a:lnTo>
+                <a:lnTo>
+                  <a:pt x="323946" y="171103"/>
+                </a:lnTo>
+                <a:lnTo>
+                  <a:pt x="367988" y="139543"/>
+                </a:lnTo>
+                <a:lnTo>
+                  <a:pt x="414000" y="110931"/>
+                </a:lnTo>
+                <a:lnTo>
+                  <a:pt x="461785" y="85389"/>
+                </a:lnTo>
+                <a:lnTo>
+                  <a:pt x="511138" y="63028"/>
+                </a:lnTo>
+                <a:lnTo>
+                  <a:pt x="561848" y="43942"/>
+                </a:lnTo>
+                <a:lnTo>
+                  <a:pt x="613698" y="28213"/>
+                </a:lnTo>
+                <a:lnTo>
+                  <a:pt x="666465" y="15910"/>
+                </a:lnTo>
+                <a:lnTo>
+                  <a:pt x="719924" y="7084"/>
+                </a:lnTo>
+                <a:lnTo>
+                  <a:pt x="773846" y="1773"/>
+                </a:lnTo>
+                <a:lnTo>
+                  <a:pt x="828000" y="0"/>
                 </a:lnTo>
                 <a:close/>
               </a:path>
             </a:pathLst>
           </a:custGeom>
           <a:solidFill>
-            <a:srgbClr val="FFFFFF"/>
+            <a:srgbClr val="FFB440"/>
           </a:solidFill>
           <a:ln>
             <a:noFill/>
@@ -4342,64 +3539,14 @@
       </p:sp>
       <p:sp>
         <p:nvSpPr>
-          <p:cNvPr id="4" name="Freeform 3"/>
-          <p:cNvSpPr/>
+          <p:cNvPr id="4" name="텍스트"/>
+          <p:cNvSpPr txBox="1"/>
           <p:nvPr/>
         </p:nvSpPr>
         <p:spPr>
           <a:xfrm>
-            <a:off x="622800" y="748800"/>
-            <a:ext cx="237600" cy="345600"/>
-          </a:xfrm>
-          <a:custGeom>
-            <a:avLst/>
-            <a:gdLst/>
-            <a:ahLst/>
-            <a:cxnLst/>
-            <a:rect l="l" t="t" r="r" b="b"/>
-            <a:pathLst>
-              <a:path w="237600" h="345600">
-                <a:moveTo>
-                  <a:pt x="237600" y="0"/>
-                </a:moveTo>
-                <a:lnTo>
-                  <a:pt x="0" y="43200"/>
-                </a:lnTo>
-                <a:lnTo>
-                  <a:pt x="0" y="345600"/>
-                </a:lnTo>
-                <a:lnTo>
-                  <a:pt x="237600" y="302400"/>
-                </a:lnTo>
-                <a:close/>
-              </a:path>
-            </a:pathLst>
-          </a:custGeom>
-          <a:solidFill>
-            <a:srgbClr val="808080"/>
-          </a:solidFill>
-          <a:ln>
-            <a:noFill/>
-          </a:ln>
-        </p:spPr>
-        <p:txBody>
-          <a:bodyPr rtlCol="0" anchor="ctr"/>
-          <a:lstStyle/>
-          <a:p>
-            <a:pPr algn="ctr"/>
-          </a:p>
-        </p:txBody>
-      </p:sp>
-      <p:sp>
-        <p:nvSpPr>
-          <p:cNvPr id="5" name="텍스트"/>
-          <p:cNvSpPr txBox="1"/>
-          <p:nvPr/>
-        </p:nvSpPr>
-        <p:spPr>
-          <a:xfrm>
-            <a:off x="1440000" y="432000"/>
-            <a:ext cx="1584000" cy="792000"/>
+            <a:off x="252000" y="432000"/>
+            <a:ext cx="2304000" cy="720000"/>
           </a:xfrm>
           <a:prstGeom prst="rect">
             <a:avLst/>
@@ -4407,85 +3554,39 @@
           <a:noFill/>
         </p:spPr>
         <p:txBody>
-          <a:bodyPr wrap="square" lIns="0" rIns="0" tIns="0" bIns="0" anchor="ctr">
+          <a:bodyPr wrap="square" lIns="0" rIns="0" tIns="0" bIns="0" anchor="t">
             <a:spAutoFit/>
           </a:bodyPr>
           <a:lstStyle/>
           <a:p>
             <a:pPr algn="l">
               <a:lnSpc>
-                <a:spcPts val="1667"/>
+                <a:spcPts val="1884"/>
               </a:lnSpc>
             </a:pPr>
             <a:r>
-              <a:rPr sz="1150" b="1">
+              <a:rPr sz="1300" b="1">
                 <a:solidFill>
-                  <a:srgbClr val="153C26"/>
+                  <a:srgbClr val="12151C"/>
                 </a:solidFill>
-                <a:latin typeface="바탕"/>
-                <a:ea typeface="바탕"/>
+                <a:latin typeface="맑은 고딕"/>
+                <a:ea typeface="맑은 고딕"/>
               </a:rPr>
-              <a:t>국민의 심부름꾼으로</a:t>
-            </a:r>
-          </a:p>
-          <a:p>
-            <a:pPr algn="l">
-              <a:lnSpc>
-                <a:spcPts val="1667"/>
-              </a:lnSpc>
-            </a:pPr>
-            <a:r>
-              <a:rPr sz="1150" b="1">
-                <a:solidFill>
-                  <a:srgbClr val="153C26"/>
-                </a:solidFill>
-                <a:latin typeface="바탕"/>
-                <a:ea typeface="바탕"/>
-              </a:rPr>
-              <a:t>일합니다</a:t>
-            </a:r>
-          </a:p>
-        </p:txBody>
-      </p:sp>
-      <p:sp>
-        <p:nvSpPr>
-          <p:cNvPr id="6" name="Rectangle 5"/>
-          <p:cNvSpPr/>
+              <a:t>국민의 심부름꾼으로 일합니다</a:t>
+            </a:r>
+          </a:p>
+        </p:txBody>
+      </p:sp>
+      <p:sp>
+        <p:nvSpPr>
+          <p:cNvPr id="5" name="텍스트"/>
+          <p:cNvSpPr txBox="1"/>
           <p:nvPr/>
         </p:nvSpPr>
         <p:spPr>
           <a:xfrm>
-            <a:off x="1440000" y="1317600"/>
-            <a:ext cx="180000" cy="10800"/>
-          </a:xfrm>
-          <a:prstGeom prst="rect">
-            <a:avLst/>
-          </a:prstGeom>
-          <a:solidFill>
-            <a:srgbClr val="308854"/>
-          </a:solidFill>
-          <a:ln>
-            <a:noFill/>
-          </a:ln>
-        </p:spPr>
-        <p:txBody>
-          <a:bodyPr rtlCol="0" anchor="ctr"/>
-          <a:lstStyle/>
-          <a:p>
-            <a:pPr algn="ctr"/>
-          </a:p>
-        </p:txBody>
-      </p:sp>
-      <p:sp>
-        <p:nvSpPr>
-          <p:cNvPr id="7" name="텍스트"/>
-          <p:cNvSpPr txBox="1"/>
-          <p:nvPr/>
-        </p:nvSpPr>
-        <p:spPr>
-          <a:xfrm>
-            <a:off x="1440000" y="1418400"/>
-            <a:ext cx="1584000" cy="108000"/>
+            <a:off x="252000" y="1476000"/>
+            <a:ext cx="1800000" cy="133351"/>
           </a:xfrm>
           <a:prstGeom prst="rect">
             <a:avLst/>
@@ -4500,13 +3601,13 @@
           <a:p>
             <a:pPr algn="l">
               <a:lnSpc>
-                <a:spcPts val="1087"/>
+                <a:spcPts val="1015"/>
               </a:lnSpc>
             </a:pPr>
             <a:r>
-              <a:rPr sz="750" b="1" spc="200">
+              <a:rPr sz="700" b="1" spc="200">
                 <a:solidFill>
-                  <a:srgbClr val="627A6C"/>
+                  <a:srgbClr val="12151C"/>
                 </a:solidFill>
                 <a:latin typeface="맑은 고딕"/>
                 <a:ea typeface="맑은 고딕"/>

--- a/public/fun/cards/public/public-30.pptx
+++ b/public/fun/cards/public/public-30.pptx
@@ -3105,8 +3105,8 @@
         </p:nvSpPr>
         <p:spPr>
           <a:xfrm>
-            <a:off x="252000" y="223200"/>
-            <a:ext cx="2016000" cy="133351"/>
+            <a:off x="252000" y="252000"/>
+            <a:ext cx="1512000" cy="123826"/>
           </a:xfrm>
           <a:prstGeom prst="rect">
             <a:avLst/>
@@ -3121,11 +3121,11 @@
           <a:p>
             <a:pPr algn="l">
               <a:lnSpc>
-                <a:spcPts val="1015"/>
+                <a:spcPts val="942"/>
               </a:lnSpc>
             </a:pPr>
             <a:r>
-              <a:rPr sz="700" b="1" spc="200">
+              <a:rPr sz="650" b="1" spc="220">
                 <a:solidFill>
                   <a:srgbClr val="6C4915"/>
                 </a:solidFill>
@@ -3137,16 +3137,37 @@
           </a:p>
         </p:txBody>
       </p:sp>
-      <p:sp>
-        <p:nvSpPr>
-          <p:cNvPr id="3" name="텍스트"/>
+      <p:cxnSp>
+        <p:nvCxnSpPr>
+          <p:cNvPr id="3" name="Connector 2"/>
+          <p:cNvCxnSpPr/>
+          <p:nvPr/>
+        </p:nvCxnSpPr>
+        <p:spPr>
+          <a:xfrm>
+            <a:off x="252000" y="388800"/>
+            <a:ext cx="2736000" cy="0"/>
+          </a:xfrm>
+          <a:prstGeom prst="line">
+            <a:avLst/>
+          </a:prstGeom>
+          <a:ln w="3600">
+            <a:solidFill>
+              <a:srgbClr val="FFE4BA"/>
+            </a:solidFill>
+          </a:ln>
+        </p:spPr>
+      </p:cxnSp>
+      <p:sp>
+        <p:nvSpPr>
+          <p:cNvPr id="4" name="텍스트"/>
           <p:cNvSpPr txBox="1"/>
           <p:nvPr/>
         </p:nvSpPr>
         <p:spPr>
           <a:xfrm>
-            <a:off x="252000" y="468000"/>
-            <a:ext cx="2520000" cy="360000"/>
+            <a:off x="252000" y="576000"/>
+            <a:ext cx="1800000" cy="237600"/>
           </a:xfrm>
           <a:prstGeom prst="rect">
             <a:avLst/>
@@ -3161,11 +3182,11 @@
           <a:p>
             <a:pPr algn="l">
               <a:lnSpc>
-                <a:spcPts val="3190"/>
+                <a:spcPts val="1957"/>
               </a:lnSpc>
             </a:pPr>
             <a:r>
-              <a:rPr sz="2200" b="1">
+              <a:rPr sz="1350" b="1" spc="120">
                 <a:solidFill>
                   <a:srgbClr val="12151C"/>
                 </a:solidFill>
@@ -3179,14 +3200,14 @@
       </p:sp>
       <p:sp>
         <p:nvSpPr>
-          <p:cNvPr id="4" name="텍스트"/>
+          <p:cNvPr id="5" name="텍스트"/>
           <p:cNvSpPr txBox="1"/>
           <p:nvPr/>
         </p:nvSpPr>
         <p:spPr>
           <a:xfrm>
-            <a:off x="252000" y="871200"/>
-            <a:ext cx="2520000" cy="171451"/>
+            <a:off x="252000" y="828000"/>
+            <a:ext cx="1800000" cy="133351"/>
           </a:xfrm>
           <a:prstGeom prst="rect">
             <a:avLst/>
@@ -3201,11 +3222,11 @@
           <a:p>
             <a:pPr algn="l">
               <a:lnSpc>
-                <a:spcPts val="1305"/>
+                <a:spcPts val="1015"/>
               </a:lnSpc>
             </a:pPr>
             <a:r>
-              <a:rPr sz="900" b="0">
+              <a:rPr sz="700" b="0" spc="60">
                 <a:solidFill>
                   <a:srgbClr val="6C4915"/>
                 </a:solidFill>
@@ -3219,14 +3240,14 @@
       </p:sp>
       <p:sp>
         <p:nvSpPr>
-          <p:cNvPr id="5" name="텍스트"/>
+          <p:cNvPr id="6" name="텍스트"/>
           <p:cNvSpPr txBox="1"/>
           <p:nvPr/>
         </p:nvSpPr>
         <p:spPr>
           <a:xfrm>
-            <a:off x="252000" y="1216800"/>
-            <a:ext cx="2520000" cy="129541"/>
+            <a:off x="252000" y="1036800"/>
+            <a:ext cx="2520000" cy="123826"/>
           </a:xfrm>
           <a:prstGeom prst="rect">
             <a:avLst/>
@@ -3241,11 +3262,11 @@
           <a:p>
             <a:pPr algn="l">
               <a:lnSpc>
-                <a:spcPts val="986"/>
+                <a:spcPts val="942"/>
               </a:lnSpc>
             </a:pPr>
             <a:r>
-              <a:rPr sz="680" b="0">
+              <a:rPr sz="650" b="0">
                 <a:solidFill>
                   <a:srgbClr val="6C4915"/>
                 </a:solidFill>
@@ -3259,14 +3280,14 @@
       </p:sp>
       <p:sp>
         <p:nvSpPr>
-          <p:cNvPr id="6" name="Rectangle 5"/>
+          <p:cNvPr id="7" name="Rectangle 6"/>
           <p:cNvSpPr/>
           <p:nvPr/>
         </p:nvSpPr>
         <p:spPr>
           <a:xfrm>
-            <a:off x="0" y="1476000"/>
-            <a:ext cx="3240000" cy="324000"/>
+            <a:off x="0" y="1339200"/>
+            <a:ext cx="3240000" cy="460800"/>
           </a:xfrm>
           <a:prstGeom prst="rect">
             <a:avLst/>
@@ -3288,14 +3309,14 @@
       </p:sp>
       <p:sp>
         <p:nvSpPr>
-          <p:cNvPr id="7" name="텍스트"/>
+          <p:cNvPr id="8" name="텍스트"/>
           <p:cNvSpPr txBox="1"/>
           <p:nvPr/>
         </p:nvSpPr>
         <p:spPr>
           <a:xfrm>
-            <a:off x="252000" y="1569600"/>
-            <a:ext cx="1296000" cy="133351"/>
+            <a:off x="252000" y="1476000"/>
+            <a:ext cx="936000" cy="91441"/>
           </a:xfrm>
           <a:prstGeom prst="rect">
             <a:avLst/>
@@ -3310,11 +3331,53 @@
           <a:p>
             <a:pPr algn="l">
               <a:lnSpc>
-                <a:spcPts val="1015"/>
+                <a:spcPts val="696"/>
               </a:lnSpc>
             </a:pPr>
             <a:r>
-              <a:rPr sz="700" b="1">
+              <a:rPr sz="480" b="1" spc="140">
+                <a:solidFill>
+                  <a:srgbClr val="12151C">
+                    <a:alpha val="70000"/>
+                  </a:srgbClr>
+                </a:solidFill>
+                <a:latin typeface="맑은 고딕"/>
+                <a:ea typeface="맑은 고딕"/>
+              </a:rPr>
+              <a:t>TEL</a:t>
+            </a:r>
+          </a:p>
+        </p:txBody>
+      </p:sp>
+      <p:sp>
+        <p:nvSpPr>
+          <p:cNvPr id="9" name="텍스트"/>
+          <p:cNvSpPr txBox="1"/>
+          <p:nvPr/>
+        </p:nvSpPr>
+        <p:spPr>
+          <a:xfrm>
+            <a:off x="252000" y="1576800"/>
+            <a:ext cx="936000" cy="123826"/>
+          </a:xfrm>
+          <a:prstGeom prst="rect">
+            <a:avLst/>
+          </a:prstGeom>
+          <a:noFill/>
+        </p:spPr>
+        <p:txBody>
+          <a:bodyPr wrap="square" lIns="0" rIns="0" tIns="0" bIns="0" anchor="t">
+            <a:spAutoFit/>
+          </a:bodyPr>
+          <a:lstStyle/>
+          <a:p>
+            <a:pPr algn="l">
+              <a:lnSpc>
+                <a:spcPts val="942"/>
+              </a:lnSpc>
+            </a:pPr>
+            <a:r>
+              <a:rPr sz="650" b="1">
                 <a:solidFill>
                   <a:srgbClr val="12151C"/>
                 </a:solidFill>
@@ -3328,14 +3391,14 @@
       </p:sp>
       <p:sp>
         <p:nvSpPr>
-          <p:cNvPr id="8" name="텍스트"/>
+          <p:cNvPr id="10" name="텍스트"/>
           <p:cNvSpPr txBox="1"/>
           <p:nvPr/>
         </p:nvSpPr>
         <p:spPr>
           <a:xfrm>
-            <a:off x="1656000" y="1569600"/>
-            <a:ext cx="1368000" cy="133351"/>
+            <a:off x="1188000" y="1476000"/>
+            <a:ext cx="1080000" cy="91441"/>
           </a:xfrm>
           <a:prstGeom prst="rect">
             <a:avLst/>
@@ -3350,11 +3413,53 @@
           <a:p>
             <a:pPr algn="l">
               <a:lnSpc>
-                <a:spcPts val="1015"/>
+                <a:spcPts val="696"/>
               </a:lnSpc>
             </a:pPr>
             <a:r>
-              <a:rPr sz="700" b="1">
+              <a:rPr sz="480" b="1" spc="140">
+                <a:solidFill>
+                  <a:srgbClr val="12151C">
+                    <a:alpha val="70000"/>
+                  </a:srgbClr>
+                </a:solidFill>
+                <a:latin typeface="맑은 고딕"/>
+                <a:ea typeface="맑은 고딕"/>
+              </a:rPr>
+              <a:t>MAIL</a:t>
+            </a:r>
+          </a:p>
+        </p:txBody>
+      </p:sp>
+      <p:sp>
+        <p:nvSpPr>
+          <p:cNvPr id="11" name="텍스트"/>
+          <p:cNvSpPr txBox="1"/>
+          <p:nvPr/>
+        </p:nvSpPr>
+        <p:spPr>
+          <a:xfrm>
+            <a:off x="1188000" y="1576800"/>
+            <a:ext cx="1080000" cy="123826"/>
+          </a:xfrm>
+          <a:prstGeom prst="rect">
+            <a:avLst/>
+          </a:prstGeom>
+          <a:noFill/>
+        </p:spPr>
+        <p:txBody>
+          <a:bodyPr wrap="square" lIns="0" rIns="0" tIns="0" bIns="0" anchor="t">
+            <a:spAutoFit/>
+          </a:bodyPr>
+          <a:lstStyle/>
+          <a:p>
+            <a:pPr algn="l">
+              <a:lnSpc>
+                <a:spcPts val="942"/>
+              </a:lnSpc>
+            </a:pPr>
+            <a:r>
+              <a:rPr sz="650" b="1">
                 <a:solidFill>
                   <a:srgbClr val="12151C"/>
                 </a:solidFill>
@@ -3366,6 +3471,27 @@
           </a:p>
         </p:txBody>
       </p:sp>
+      <p:cxnSp>
+        <p:nvCxnSpPr>
+          <p:cNvPr id="12" name="Connector 11"/>
+          <p:cNvCxnSpPr/>
+          <p:nvPr/>
+        </p:nvCxnSpPr>
+        <p:spPr>
+          <a:xfrm>
+            <a:off x="1108800" y="1468800"/>
+            <a:ext cx="0" cy="208800"/>
+          </a:xfrm>
+          <a:prstGeom prst="line">
+            <a:avLst/>
+          </a:prstGeom>
+          <a:ln w="3600">
+            <a:solidFill>
+              <a:srgbClr val="12151C"/>
+            </a:solidFill>
+          </a:ln>
+        </p:spPr>
+      </p:cxnSp>
     </p:spTree>
   </p:cSld>
   <p:clrMapOvr>
@@ -3394,14 +3520,54 @@
       <p:grpSpPr/>
       <p:sp>
         <p:nvSpPr>
-          <p:cNvPr id="2" name="Rectangle 1"/>
+          <p:cNvPr id="2" name="텍스트"/>
+          <p:cNvSpPr txBox="1"/>
+          <p:nvPr/>
+        </p:nvSpPr>
+        <p:spPr>
+          <a:xfrm>
+            <a:off x="252000" y="252000"/>
+            <a:ext cx="1080000" cy="99061"/>
+          </a:xfrm>
+          <a:prstGeom prst="rect">
+            <a:avLst/>
+          </a:prstGeom>
+          <a:noFill/>
+        </p:spPr>
+        <p:txBody>
+          <a:bodyPr wrap="square" lIns="0" rIns="0" tIns="0" bIns="0" anchor="t">
+            <a:spAutoFit/>
+          </a:bodyPr>
+          <a:lstStyle/>
+          <a:p>
+            <a:pPr algn="l">
+              <a:lnSpc>
+                <a:spcPts val="754"/>
+              </a:lnSpc>
+            </a:pPr>
+            <a:r>
+              <a:rPr sz="520" b="1" spc="240">
+                <a:solidFill>
+                  <a:srgbClr val="6B7280"/>
+                </a:solidFill>
+                <a:latin typeface="맑은 고딕"/>
+                <a:ea typeface="맑은 고딕"/>
+              </a:rPr>
+              <a:t>담당 업무</a:t>
+            </a:r>
+          </a:p>
+        </p:txBody>
+      </p:sp>
+      <p:sp>
+        <p:nvSpPr>
+          <p:cNvPr id="3" name="Rectangle 2"/>
           <p:cNvSpPr/>
           <p:nvPr/>
         </p:nvSpPr>
         <p:spPr>
           <a:xfrm>
-            <a:off x="0" y="0"/>
-            <a:ext cx="3240000" cy="1800000"/>
+            <a:off x="252000" y="352800"/>
+            <a:ext cx="108000" cy="14400"/>
           </a:xfrm>
           <a:prstGeom prst="rect">
             <a:avLst/>
@@ -3421,132 +3587,37 @@
           </a:p>
         </p:txBody>
       </p:sp>
-      <p:sp>
-        <p:nvSpPr>
-          <p:cNvPr id="3" name="Freeform 2"/>
-          <p:cNvSpPr/>
+      <p:cxnSp>
+        <p:nvCxnSpPr>
+          <p:cNvPr id="4" name="Connector 3"/>
+          <p:cNvCxnSpPr/>
           <p:nvPr/>
-        </p:nvSpPr>
-        <p:spPr>
-          <a:xfrm>
-            <a:off x="2412000" y="972000"/>
-            <a:ext cx="828000" cy="828000"/>
-          </a:xfrm>
-          <a:custGeom>
+        </p:nvCxnSpPr>
+        <p:spPr>
+          <a:xfrm>
+            <a:off x="252000" y="453600"/>
+            <a:ext cx="1512000" cy="0"/>
+          </a:xfrm>
+          <a:prstGeom prst="line">
             <a:avLst/>
-            <a:gdLst/>
-            <a:ahLst/>
-            <a:cxnLst/>
-            <a:rect l="l" t="t" r="r" b="b"/>
-            <a:pathLst>
-              <a:path w="828000" h="828000">
-                <a:moveTo>
-                  <a:pt x="828000" y="828000"/>
-                </a:moveTo>
-                <a:lnTo>
-                  <a:pt x="0" y="828000"/>
-                </a:lnTo>
-                <a:lnTo>
-                  <a:pt x="1773" y="773846"/>
-                </a:lnTo>
-                <a:lnTo>
-                  <a:pt x="7084" y="719924"/>
-                </a:lnTo>
-                <a:lnTo>
-                  <a:pt x="15910" y="666465"/>
-                </a:lnTo>
-                <a:lnTo>
-                  <a:pt x="28213" y="613698"/>
-                </a:lnTo>
-                <a:lnTo>
-                  <a:pt x="43942" y="561848"/>
-                </a:lnTo>
-                <a:lnTo>
-                  <a:pt x="63028" y="511138"/>
-                </a:lnTo>
-                <a:lnTo>
-                  <a:pt x="85389" y="461785"/>
-                </a:lnTo>
-                <a:lnTo>
-                  <a:pt x="110931" y="414000"/>
-                </a:lnTo>
-                <a:lnTo>
-                  <a:pt x="139543" y="367988"/>
-                </a:lnTo>
-                <a:lnTo>
-                  <a:pt x="171103" y="323946"/>
-                </a:lnTo>
-                <a:lnTo>
-                  <a:pt x="205477" y="282062"/>
-                </a:lnTo>
-                <a:lnTo>
-                  <a:pt x="242516" y="242516"/>
-                </a:lnTo>
-                <a:lnTo>
-                  <a:pt x="282062" y="205477"/>
-                </a:lnTo>
-                <a:lnTo>
-                  <a:pt x="323946" y="171103"/>
-                </a:lnTo>
-                <a:lnTo>
-                  <a:pt x="367988" y="139543"/>
-                </a:lnTo>
-                <a:lnTo>
-                  <a:pt x="414000" y="110931"/>
-                </a:lnTo>
-                <a:lnTo>
-                  <a:pt x="461785" y="85389"/>
-                </a:lnTo>
-                <a:lnTo>
-                  <a:pt x="511138" y="63028"/>
-                </a:lnTo>
-                <a:lnTo>
-                  <a:pt x="561848" y="43942"/>
-                </a:lnTo>
-                <a:lnTo>
-                  <a:pt x="613698" y="28213"/>
-                </a:lnTo>
-                <a:lnTo>
-                  <a:pt x="666465" y="15910"/>
-                </a:lnTo>
-                <a:lnTo>
-                  <a:pt x="719924" y="7084"/>
-                </a:lnTo>
-                <a:lnTo>
-                  <a:pt x="773846" y="1773"/>
-                </a:lnTo>
-                <a:lnTo>
-                  <a:pt x="828000" y="0"/>
-                </a:lnTo>
-                <a:close/>
-              </a:path>
-            </a:pathLst>
-          </a:custGeom>
-          <a:solidFill>
-            <a:srgbClr val="FFB440"/>
-          </a:solidFill>
-          <a:ln>
-            <a:noFill/>
+          </a:prstGeom>
+          <a:ln w="3600">
+            <a:solidFill>
+              <a:srgbClr val="DCDFE4"/>
+            </a:solidFill>
           </a:ln>
         </p:spPr>
-        <p:txBody>
-          <a:bodyPr rtlCol="0" anchor="ctr"/>
-          <a:lstStyle/>
-          <a:p>
-            <a:pPr algn="ctr"/>
-          </a:p>
-        </p:txBody>
-      </p:sp>
-      <p:sp>
-        <p:nvSpPr>
-          <p:cNvPr id="4" name="텍스트"/>
+      </p:cxnSp>
+      <p:sp>
+        <p:nvSpPr>
+          <p:cNvPr id="5" name="텍스트"/>
           <p:cNvSpPr txBox="1"/>
           <p:nvPr/>
         </p:nvSpPr>
         <p:spPr>
           <a:xfrm>
-            <a:off x="252000" y="432000"/>
-            <a:ext cx="2304000" cy="720000"/>
+            <a:off x="252000" y="507600"/>
+            <a:ext cx="216000" cy="95251"/>
           </a:xfrm>
           <a:prstGeom prst="rect">
             <a:avLst/>
@@ -3561,32 +3632,133 @@
           <a:p>
             <a:pPr algn="l">
               <a:lnSpc>
-                <a:spcPts val="1884"/>
+                <a:spcPts val="725"/>
               </a:lnSpc>
             </a:pPr>
             <a:r>
-              <a:rPr sz="1300" b="1">
+              <a:rPr sz="500" b="1" spc="100">
+                <a:solidFill>
+                  <a:srgbClr val="6B7280"/>
+                </a:solidFill>
+                <a:latin typeface="맑은 고딕"/>
+                <a:ea typeface="맑은 고딕"/>
+              </a:rPr>
+              <a:t>01</a:t>
+            </a:r>
+          </a:p>
+        </p:txBody>
+      </p:sp>
+      <p:sp>
+        <p:nvSpPr>
+          <p:cNvPr id="6" name="텍스트"/>
+          <p:cNvSpPr txBox="1"/>
+          <p:nvPr/>
+        </p:nvSpPr>
+        <p:spPr>
+          <a:xfrm>
+            <a:off x="489600" y="496800"/>
+            <a:ext cx="1260000" cy="133351"/>
+          </a:xfrm>
+          <a:prstGeom prst="rect">
+            <a:avLst/>
+          </a:prstGeom>
+          <a:noFill/>
+        </p:spPr>
+        <p:txBody>
+          <a:bodyPr wrap="square" lIns="0" rIns="0" tIns="0" bIns="0" anchor="t">
+            <a:spAutoFit/>
+          </a:bodyPr>
+          <a:lstStyle/>
+          <a:p>
+            <a:pPr algn="l">
+              <a:lnSpc>
+                <a:spcPts val="1015"/>
+              </a:lnSpc>
+            </a:pPr>
+            <a:r>
+              <a:rPr sz="700" b="0">
                 <a:solidFill>
                   <a:srgbClr val="12151C"/>
                 </a:solidFill>
                 <a:latin typeface="맑은 고딕"/>
                 <a:ea typeface="맑은 고딕"/>
               </a:rPr>
-              <a:t>국민의 심부름꾼으로 일합니다</a:t>
-            </a:r>
-          </a:p>
-        </p:txBody>
-      </p:sp>
-      <p:sp>
-        <p:nvSpPr>
-          <p:cNvPr id="5" name="텍스트"/>
+              <a:t>주민 서비스</a:t>
+            </a:r>
+          </a:p>
+        </p:txBody>
+      </p:sp>
+      <p:cxnSp>
+        <p:nvCxnSpPr>
+          <p:cNvPr id="7" name="Connector 6"/>
+          <p:cNvCxnSpPr/>
+          <p:nvPr/>
+        </p:nvCxnSpPr>
+        <p:spPr>
+          <a:xfrm>
+            <a:off x="252000" y="640800"/>
+            <a:ext cx="1512000" cy="0"/>
+          </a:xfrm>
+          <a:prstGeom prst="line">
+            <a:avLst/>
+          </a:prstGeom>
+          <a:ln w="3600">
+            <a:solidFill>
+              <a:srgbClr val="DCDFE4"/>
+            </a:solidFill>
+          </a:ln>
+        </p:spPr>
+      </p:cxnSp>
+      <p:sp>
+        <p:nvSpPr>
+          <p:cNvPr id="8" name="텍스트"/>
           <p:cNvSpPr txBox="1"/>
           <p:nvPr/>
         </p:nvSpPr>
         <p:spPr>
           <a:xfrm>
-            <a:off x="252000" y="1476000"/>
-            <a:ext cx="1800000" cy="133351"/>
+            <a:off x="252000" y="694800"/>
+            <a:ext cx="216000" cy="95251"/>
+          </a:xfrm>
+          <a:prstGeom prst="rect">
+            <a:avLst/>
+          </a:prstGeom>
+          <a:noFill/>
+        </p:spPr>
+        <p:txBody>
+          <a:bodyPr wrap="square" lIns="0" rIns="0" tIns="0" bIns="0" anchor="t">
+            <a:spAutoFit/>
+          </a:bodyPr>
+          <a:lstStyle/>
+          <a:p>
+            <a:pPr algn="l">
+              <a:lnSpc>
+                <a:spcPts val="725"/>
+              </a:lnSpc>
+            </a:pPr>
+            <a:r>
+              <a:rPr sz="500" b="1" spc="100">
+                <a:solidFill>
+                  <a:srgbClr val="6B7280"/>
+                </a:solidFill>
+                <a:latin typeface="맑은 고딕"/>
+                <a:ea typeface="맑은 고딕"/>
+              </a:rPr>
+              <a:t>02</a:t>
+            </a:r>
+          </a:p>
+        </p:txBody>
+      </p:sp>
+      <p:sp>
+        <p:nvSpPr>
+          <p:cNvPr id="9" name="텍스트"/>
+          <p:cNvSpPr txBox="1"/>
+          <p:nvPr/>
+        </p:nvSpPr>
+        <p:spPr>
+          <a:xfrm>
+            <a:off x="489600" y="684000"/>
+            <a:ext cx="1260000" cy="133351"/>
           </a:xfrm>
           <a:prstGeom prst="rect">
             <a:avLst/>
@@ -3605,7 +3777,484 @@
               </a:lnSpc>
             </a:pPr>
             <a:r>
-              <a:rPr sz="700" b="1" spc="200">
+              <a:rPr sz="700" b="0">
+                <a:solidFill>
+                  <a:srgbClr val="12151C"/>
+                </a:solidFill>
+                <a:latin typeface="맑은 고딕"/>
+                <a:ea typeface="맑은 고딕"/>
+              </a:rPr>
+              <a:t>교통 안내</a:t>
+            </a:r>
+          </a:p>
+        </p:txBody>
+      </p:sp>
+      <p:cxnSp>
+        <p:nvCxnSpPr>
+          <p:cNvPr id="10" name="Connector 9"/>
+          <p:cNvCxnSpPr/>
+          <p:nvPr/>
+        </p:nvCxnSpPr>
+        <p:spPr>
+          <a:xfrm>
+            <a:off x="252000" y="828000"/>
+            <a:ext cx="1512000" cy="0"/>
+          </a:xfrm>
+          <a:prstGeom prst="line">
+            <a:avLst/>
+          </a:prstGeom>
+          <a:ln w="3600">
+            <a:solidFill>
+              <a:srgbClr val="DCDFE4"/>
+            </a:solidFill>
+          </a:ln>
+        </p:spPr>
+      </p:cxnSp>
+      <p:sp>
+        <p:nvSpPr>
+          <p:cNvPr id="11" name="텍스트"/>
+          <p:cNvSpPr txBox="1"/>
+          <p:nvPr/>
+        </p:nvSpPr>
+        <p:spPr>
+          <a:xfrm>
+            <a:off x="252000" y="882000"/>
+            <a:ext cx="216000" cy="95251"/>
+          </a:xfrm>
+          <a:prstGeom prst="rect">
+            <a:avLst/>
+          </a:prstGeom>
+          <a:noFill/>
+        </p:spPr>
+        <p:txBody>
+          <a:bodyPr wrap="square" lIns="0" rIns="0" tIns="0" bIns="0" anchor="t">
+            <a:spAutoFit/>
+          </a:bodyPr>
+          <a:lstStyle/>
+          <a:p>
+            <a:pPr algn="l">
+              <a:lnSpc>
+                <a:spcPts val="725"/>
+              </a:lnSpc>
+            </a:pPr>
+            <a:r>
+              <a:rPr sz="500" b="1" spc="100">
+                <a:solidFill>
+                  <a:srgbClr val="6B7280"/>
+                </a:solidFill>
+                <a:latin typeface="맑은 고딕"/>
+                <a:ea typeface="맑은 고딕"/>
+              </a:rPr>
+              <a:t>03</a:t>
+            </a:r>
+          </a:p>
+        </p:txBody>
+      </p:sp>
+      <p:sp>
+        <p:nvSpPr>
+          <p:cNvPr id="12" name="텍스트"/>
+          <p:cNvSpPr txBox="1"/>
+          <p:nvPr/>
+        </p:nvSpPr>
+        <p:spPr>
+          <a:xfrm>
+            <a:off x="489600" y="871200"/>
+            <a:ext cx="1260000" cy="133351"/>
+          </a:xfrm>
+          <a:prstGeom prst="rect">
+            <a:avLst/>
+          </a:prstGeom>
+          <a:noFill/>
+        </p:spPr>
+        <p:txBody>
+          <a:bodyPr wrap="square" lIns="0" rIns="0" tIns="0" bIns="0" anchor="t">
+            <a:spAutoFit/>
+          </a:bodyPr>
+          <a:lstStyle/>
+          <a:p>
+            <a:pPr algn="l">
+              <a:lnSpc>
+                <a:spcPts val="1015"/>
+              </a:lnSpc>
+            </a:pPr>
+            <a:r>
+              <a:rPr sz="700" b="0">
+                <a:solidFill>
+                  <a:srgbClr val="12151C"/>
+                </a:solidFill>
+                <a:latin typeface="맑은 고딕"/>
+                <a:ea typeface="맑은 고딕"/>
+              </a:rPr>
+              <a:t>청년 지원</a:t>
+            </a:r>
+          </a:p>
+        </p:txBody>
+      </p:sp>
+      <p:cxnSp>
+        <p:nvCxnSpPr>
+          <p:cNvPr id="13" name="Connector 12"/>
+          <p:cNvCxnSpPr/>
+          <p:nvPr/>
+        </p:nvCxnSpPr>
+        <p:spPr>
+          <a:xfrm>
+            <a:off x="252000" y="1015200"/>
+            <a:ext cx="1512000" cy="0"/>
+          </a:xfrm>
+          <a:prstGeom prst="line">
+            <a:avLst/>
+          </a:prstGeom>
+          <a:ln w="3600">
+            <a:solidFill>
+              <a:srgbClr val="DCDFE4"/>
+            </a:solidFill>
+          </a:ln>
+        </p:spPr>
+      </p:cxnSp>
+      <p:sp>
+        <p:nvSpPr>
+          <p:cNvPr id="14" name="텍스트"/>
+          <p:cNvSpPr txBox="1"/>
+          <p:nvPr/>
+        </p:nvSpPr>
+        <p:spPr>
+          <a:xfrm>
+            <a:off x="252000" y="1069200"/>
+            <a:ext cx="216000" cy="95251"/>
+          </a:xfrm>
+          <a:prstGeom prst="rect">
+            <a:avLst/>
+          </a:prstGeom>
+          <a:noFill/>
+        </p:spPr>
+        <p:txBody>
+          <a:bodyPr wrap="square" lIns="0" rIns="0" tIns="0" bIns="0" anchor="t">
+            <a:spAutoFit/>
+          </a:bodyPr>
+          <a:lstStyle/>
+          <a:p>
+            <a:pPr algn="l">
+              <a:lnSpc>
+                <a:spcPts val="725"/>
+              </a:lnSpc>
+            </a:pPr>
+            <a:r>
+              <a:rPr sz="500" b="1" spc="100">
+                <a:solidFill>
+                  <a:srgbClr val="6B7280"/>
+                </a:solidFill>
+                <a:latin typeface="맑은 고딕"/>
+                <a:ea typeface="맑은 고딕"/>
+              </a:rPr>
+              <a:t>04</a:t>
+            </a:r>
+          </a:p>
+        </p:txBody>
+      </p:sp>
+      <p:sp>
+        <p:nvSpPr>
+          <p:cNvPr id="15" name="텍스트"/>
+          <p:cNvSpPr txBox="1"/>
+          <p:nvPr/>
+        </p:nvSpPr>
+        <p:spPr>
+          <a:xfrm>
+            <a:off x="489600" y="1058400"/>
+            <a:ext cx="1260000" cy="133351"/>
+          </a:xfrm>
+          <a:prstGeom prst="rect">
+            <a:avLst/>
+          </a:prstGeom>
+          <a:noFill/>
+        </p:spPr>
+        <p:txBody>
+          <a:bodyPr wrap="square" lIns="0" rIns="0" tIns="0" bIns="0" anchor="t">
+            <a:spAutoFit/>
+          </a:bodyPr>
+          <a:lstStyle/>
+          <a:p>
+            <a:pPr algn="l">
+              <a:lnSpc>
+                <a:spcPts val="1015"/>
+              </a:lnSpc>
+            </a:pPr>
+            <a:r>
+              <a:rPr sz="700" b="0">
+                <a:solidFill>
+                  <a:srgbClr val="12151C"/>
+                </a:solidFill>
+                <a:latin typeface="맑은 고딕"/>
+                <a:ea typeface="맑은 고딕"/>
+              </a:rPr>
+              <a:t>노인 복지</a:t>
+            </a:r>
+          </a:p>
+        </p:txBody>
+      </p:sp>
+      <p:cxnSp>
+        <p:nvCxnSpPr>
+          <p:cNvPr id="16" name="Connector 15"/>
+          <p:cNvCxnSpPr/>
+          <p:nvPr/>
+        </p:nvCxnSpPr>
+        <p:spPr>
+          <a:xfrm>
+            <a:off x="252000" y="1202400"/>
+            <a:ext cx="1512000" cy="0"/>
+          </a:xfrm>
+          <a:prstGeom prst="line">
+            <a:avLst/>
+          </a:prstGeom>
+          <a:ln w="3600">
+            <a:solidFill>
+              <a:srgbClr val="DCDFE4"/>
+            </a:solidFill>
+          </a:ln>
+        </p:spPr>
+      </p:cxnSp>
+      <p:sp>
+        <p:nvSpPr>
+          <p:cNvPr id="17" name="Rectangle 16"/>
+          <p:cNvSpPr/>
+          <p:nvPr/>
+        </p:nvSpPr>
+        <p:spPr>
+          <a:xfrm>
+            <a:off x="2088000" y="252000"/>
+            <a:ext cx="900000" cy="1296000"/>
+          </a:xfrm>
+          <a:prstGeom prst="rect">
+            <a:avLst/>
+          </a:prstGeom>
+          <a:solidFill>
+            <a:srgbClr val="FF9F0A"/>
+          </a:solidFill>
+          <a:ln>
+            <a:noFill/>
+          </a:ln>
+        </p:spPr>
+        <p:txBody>
+          <a:bodyPr rtlCol="0" anchor="ctr"/>
+          <a:lstStyle/>
+          <a:p>
+            <a:pPr algn="ctr"/>
+          </a:p>
+        </p:txBody>
+      </p:sp>
+      <p:sp>
+        <p:nvSpPr>
+          <p:cNvPr id="18" name="텍스트"/>
+          <p:cNvSpPr txBox="1"/>
+          <p:nvPr/>
+        </p:nvSpPr>
+        <p:spPr>
+          <a:xfrm>
+            <a:off x="2196000" y="360000"/>
+            <a:ext cx="684000" cy="95251"/>
+          </a:xfrm>
+          <a:prstGeom prst="rect">
+            <a:avLst/>
+          </a:prstGeom>
+          <a:noFill/>
+        </p:spPr>
+        <p:txBody>
+          <a:bodyPr wrap="square" lIns="0" rIns="0" tIns="0" bIns="0" anchor="t">
+            <a:spAutoFit/>
+          </a:bodyPr>
+          <a:lstStyle/>
+          <a:p>
+            <a:pPr algn="l">
+              <a:lnSpc>
+                <a:spcPts val="725"/>
+              </a:lnSpc>
+            </a:pPr>
+            <a:r>
+              <a:rPr sz="500" b="1" spc="240">
+                <a:solidFill>
+                  <a:srgbClr val="12151C">
+                    <a:alpha val="75000"/>
+                  </a:srgbClr>
+                </a:solidFill>
+                <a:latin typeface="맑은 고딕"/>
+                <a:ea typeface="맑은 고딕"/>
+              </a:rPr>
+              <a:t>INFO</a:t>
+            </a:r>
+          </a:p>
+        </p:txBody>
+      </p:sp>
+      <p:sp>
+        <p:nvSpPr>
+          <p:cNvPr id="19" name="텍스트"/>
+          <p:cNvSpPr txBox="1"/>
+          <p:nvPr/>
+        </p:nvSpPr>
+        <p:spPr>
+          <a:xfrm>
+            <a:off x="2196000" y="504000"/>
+            <a:ext cx="684000" cy="121921"/>
+          </a:xfrm>
+          <a:prstGeom prst="rect">
+            <a:avLst/>
+          </a:prstGeom>
+          <a:noFill/>
+        </p:spPr>
+        <p:txBody>
+          <a:bodyPr wrap="square" lIns="0" rIns="0" tIns="0" bIns="0" anchor="t">
+            <a:spAutoFit/>
+          </a:bodyPr>
+          <a:lstStyle/>
+          <a:p>
+            <a:pPr algn="l">
+              <a:lnSpc>
+                <a:spcPts val="927"/>
+              </a:lnSpc>
+            </a:pPr>
+            <a:r>
+              <a:rPr sz="640" b="1">
+                <a:solidFill>
+                  <a:srgbClr val="12151C"/>
+                </a:solidFill>
+                <a:latin typeface="맑은 고딕"/>
+                <a:ea typeface="맑은 고딕"/>
+              </a:rPr>
+              <a:t>평일 09:00 – 17:30</a:t>
+            </a:r>
+          </a:p>
+        </p:txBody>
+      </p:sp>
+      <p:cxnSp>
+        <p:nvCxnSpPr>
+          <p:cNvPr id="20" name="Connector 19"/>
+          <p:cNvCxnSpPr/>
+          <p:nvPr/>
+        </p:nvCxnSpPr>
+        <p:spPr>
+          <a:xfrm>
+            <a:off x="2196000" y="770400"/>
+            <a:ext cx="684000" cy="0"/>
+          </a:xfrm>
+          <a:prstGeom prst="line">
+            <a:avLst/>
+          </a:prstGeom>
+          <a:ln w="3600">
+            <a:solidFill>
+              <a:srgbClr val="12151C"/>
+            </a:solidFill>
+          </a:ln>
+        </p:spPr>
+      </p:cxnSp>
+      <p:sp>
+        <p:nvSpPr>
+          <p:cNvPr id="21" name="텍스트"/>
+          <p:cNvSpPr txBox="1"/>
+          <p:nvPr/>
+        </p:nvSpPr>
+        <p:spPr>
+          <a:xfrm>
+            <a:off x="2196000" y="849600"/>
+            <a:ext cx="684000" cy="91441"/>
+          </a:xfrm>
+          <a:prstGeom prst="rect">
+            <a:avLst/>
+          </a:prstGeom>
+          <a:noFill/>
+        </p:spPr>
+        <p:txBody>
+          <a:bodyPr wrap="square" lIns="0" rIns="0" tIns="0" bIns="0" anchor="t">
+            <a:spAutoFit/>
+          </a:bodyPr>
+          <a:lstStyle/>
+          <a:p>
+            <a:pPr algn="l">
+              <a:lnSpc>
+                <a:spcPts val="696"/>
+              </a:lnSpc>
+            </a:pPr>
+            <a:r>
+              <a:rPr sz="480" b="1" spc="140">
+                <a:solidFill>
+                  <a:srgbClr val="12151C">
+                    <a:alpha val="75000"/>
+                  </a:srgbClr>
+                </a:solidFill>
+                <a:latin typeface="맑은 고딕"/>
+                <a:ea typeface="맑은 고딕"/>
+              </a:rPr>
+              <a:t>BLOG</a:t>
+            </a:r>
+          </a:p>
+        </p:txBody>
+      </p:sp>
+      <p:sp>
+        <p:nvSpPr>
+          <p:cNvPr id="22" name="텍스트"/>
+          <p:cNvSpPr txBox="1"/>
+          <p:nvPr/>
+        </p:nvSpPr>
+        <p:spPr>
+          <a:xfrm>
+            <a:off x="2196000" y="957600"/>
+            <a:ext cx="684000" cy="121921"/>
+          </a:xfrm>
+          <a:prstGeom prst="rect">
+            <a:avLst/>
+          </a:prstGeom>
+          <a:noFill/>
+        </p:spPr>
+        <p:txBody>
+          <a:bodyPr wrap="square" lIns="0" rIns="0" tIns="0" bIns="0" anchor="t">
+            <a:spAutoFit/>
+          </a:bodyPr>
+          <a:lstStyle/>
+          <a:p>
+            <a:pPr algn="l">
+              <a:lnSpc>
+                <a:spcPts val="927"/>
+              </a:lnSpc>
+            </a:pPr>
+            <a:r>
+              <a:rPr sz="640" b="1">
+                <a:solidFill>
+                  <a:srgbClr val="12151C"/>
+                </a:solidFill>
+                <a:latin typeface="맑은 고딕"/>
+                <a:ea typeface="맑은 고딕"/>
+              </a:rPr>
+              <a:t>blog.example.com</a:t>
+            </a:r>
+          </a:p>
+        </p:txBody>
+      </p:sp>
+      <p:sp>
+        <p:nvSpPr>
+          <p:cNvPr id="23" name="텍스트"/>
+          <p:cNvSpPr txBox="1"/>
+          <p:nvPr/>
+        </p:nvSpPr>
+        <p:spPr>
+          <a:xfrm>
+            <a:off x="2196000" y="1368000"/>
+            <a:ext cx="720000" cy="106681"/>
+          </a:xfrm>
+          <a:prstGeom prst="rect">
+            <a:avLst/>
+          </a:prstGeom>
+          <a:noFill/>
+        </p:spPr>
+        <p:txBody>
+          <a:bodyPr wrap="square" lIns="0" rIns="0" tIns="0" bIns="0" anchor="t">
+            <a:spAutoFit/>
+          </a:bodyPr>
+          <a:lstStyle/>
+          <a:p>
+            <a:pPr algn="l">
+              <a:lnSpc>
+                <a:spcPts val="811"/>
+              </a:lnSpc>
+            </a:pPr>
+            <a:r>
+              <a:rPr sz="560" b="1" spc="80">
                 <a:solidFill>
                   <a:srgbClr val="12151C"/>
                 </a:solidFill>
